--- a/McDonalds_Nutrition_Diagnostic_Analysis.pptx
+++ b/McDonalds_Nutrition_Diagnostic_Analysis.pptx
@@ -164,12 +164,12 @@
   <pc:docChgLst>
     <pc:chgData name="sarode.sauravi28@gmail.com" userId="697cdf47ab7ca242" providerId="LiveId" clId="{6A36D47F-8D11-48F4-9A4C-4421F9ADC6CF}"/>
     <pc:docChg chg="undo redo custSel addSld modSld sldOrd modSection">
-      <pc:chgData name="sarode.sauravi28@gmail.com" userId="697cdf47ab7ca242" providerId="LiveId" clId="{6A36D47F-8D11-48F4-9A4C-4421F9ADC6CF}" dt="2026-10-10T17:53:58.305" v="290" actId="20577"/>
+      <pc:chgData name="sarode.sauravi28@gmail.com" userId="697cdf47ab7ca242" providerId="LiveId" clId="{6A36D47F-8D11-48F4-9A4C-4421F9ADC6CF}" dt="2026-10-11T09:44:47.353" v="320" actId="478"/>
       <pc:docMkLst>
         <pc:docMk/>
       </pc:docMkLst>
       <pc:sldChg chg="addSp modSp mod">
-        <pc:chgData name="sarode.sauravi28@gmail.com" userId="697cdf47ab7ca242" providerId="LiveId" clId="{6A36D47F-8D11-48F4-9A4C-4421F9ADC6CF}" dt="2026-10-10T08:21:18.251" v="35" actId="14100"/>
+        <pc:chgData name="sarode.sauravi28@gmail.com" userId="697cdf47ab7ca242" providerId="LiveId" clId="{6A36D47F-8D11-48F4-9A4C-4421F9ADC6CF}" dt="2026-10-11T09:44:38.596" v="318" actId="1076"/>
         <pc:sldMkLst>
           <pc:docMk/>
           <pc:sldMk cId="0" sldId="256"/>
@@ -183,7 +183,7 @@
           </ac:spMkLst>
         </pc:spChg>
         <pc:spChg chg="mod">
-          <ac:chgData name="sarode.sauravi28@gmail.com" userId="697cdf47ab7ca242" providerId="LiveId" clId="{6A36D47F-8D11-48F4-9A4C-4421F9ADC6CF}" dt="2026-10-10T08:21:18.251" v="35" actId="14100"/>
+          <ac:chgData name="sarode.sauravi28@gmail.com" userId="697cdf47ab7ca242" providerId="LiveId" clId="{6A36D47F-8D11-48F4-9A4C-4421F9ADC6CF}" dt="2026-10-11T09:43:15.728" v="305" actId="20577"/>
           <ac:spMkLst>
             <pc:docMk/>
             <pc:sldMk cId="0" sldId="256"/>
@@ -198,9 +198,17 @@
             <ac:spMk id="6" creationId="{FAC7727C-7533-3EE0-335F-297586BEE1B6}"/>
           </ac:spMkLst>
         </pc:spChg>
+        <pc:spChg chg="add mod">
+          <ac:chgData name="sarode.sauravi28@gmail.com" userId="697cdf47ab7ca242" providerId="LiveId" clId="{6A36D47F-8D11-48F4-9A4C-4421F9ADC6CF}" dt="2026-10-11T09:44:38.596" v="318" actId="1076"/>
+          <ac:spMkLst>
+            <pc:docMk/>
+            <pc:sldMk cId="0" sldId="256"/>
+            <ac:spMk id="7" creationId="{AF38A78A-B4E9-7D1A-5C83-97992059A72A}"/>
+          </ac:spMkLst>
+        </pc:spChg>
       </pc:sldChg>
-      <pc:sldChg chg="modSp mod">
-        <pc:chgData name="sarode.sauravi28@gmail.com" userId="697cdf47ab7ca242" providerId="LiveId" clId="{6A36D47F-8D11-48F4-9A4C-4421F9ADC6CF}" dt="2026-10-10T17:52:42.445" v="288" actId="20577"/>
+      <pc:sldChg chg="addSp delSp modSp mod">
+        <pc:chgData name="sarode.sauravi28@gmail.com" userId="697cdf47ab7ca242" providerId="LiveId" clId="{6A36D47F-8D11-48F4-9A4C-4421F9ADC6CF}" dt="2026-10-11T09:44:47.353" v="320" actId="478"/>
         <pc:sldMkLst>
           <pc:docMk/>
           <pc:sldMk cId="0" sldId="257"/>
@@ -227,6 +235,14 @@
             <pc:docMk/>
             <pc:sldMk cId="0" sldId="257"/>
             <ac:spMk id="10" creationId="{00000000-0000-0000-0000-000000000000}"/>
+          </ac:spMkLst>
+        </pc:spChg>
+        <pc:spChg chg="add del mod">
+          <ac:chgData name="sarode.sauravi28@gmail.com" userId="697cdf47ab7ca242" providerId="LiveId" clId="{6A36D47F-8D11-48F4-9A4C-4421F9ADC6CF}" dt="2026-10-11T09:44:47.353" v="320" actId="478"/>
+          <ac:spMkLst>
+            <pc:docMk/>
+            <pc:sldMk cId="0" sldId="257"/>
+            <ac:spMk id="12" creationId="{50E721BF-509E-F259-3A94-B8EA76C6192F}"/>
           </ac:spMkLst>
         </pc:spChg>
       </pc:sldChg>
@@ -2644,7 +2660,7 @@
           </a:prstGeom>
           <a:extLst>
             <a:ext uri="{C572A759-6A51-4108-AA02-DFA0A04FC94B}">
-              <ma14:wrappingTextBoxFlag xmlns:ma14="http://schemas.microsoft.com/office/mac/drawingml/2011/main" xmlns="" val="0"/>
+              <ma14:wrappingTextBoxFlag xmlns="" xmlns:ma14="http://schemas.microsoft.com/office/mac/drawingml/2011/main" val="0"/>
             </a:ext>
           </a:extLst>
         </p:spPr>
@@ -2758,7 +2774,7 @@
           </a:prstGeom>
           <a:extLst>
             <a:ext uri="{C572A759-6A51-4108-AA02-DFA0A04FC94B}">
-              <ma14:wrappingTextBoxFlag xmlns:ma14="http://schemas.microsoft.com/office/mac/drawingml/2011/main" xmlns="" val="0"/>
+              <ma14:wrappingTextBoxFlag xmlns="" xmlns:ma14="http://schemas.microsoft.com/office/mac/drawingml/2011/main" val="0"/>
             </a:ext>
           </a:extLst>
         </p:spPr>
@@ -2833,7 +2849,7 @@
           </a:prstGeom>
           <a:extLst>
             <a:ext uri="{C572A759-6A51-4108-AA02-DFA0A04FC94B}">
-              <ma14:wrappingTextBoxFlag xmlns:ma14="http://schemas.microsoft.com/office/mac/drawingml/2011/main" xmlns="" val="0"/>
+              <ma14:wrappingTextBoxFlag xmlns="" xmlns:ma14="http://schemas.microsoft.com/office/mac/drawingml/2011/main" val="0"/>
             </a:ext>
           </a:extLst>
         </p:spPr>
@@ -3318,6 +3334,8 @@
               </a:rPr>
               <a:t>-2026</a:t>
             </a:r>
+          </a:p>
+          <a:p>
             <a:endParaRPr lang="en-US" sz="1400" dirty="0">
               <a:solidFill>
                 <a:schemeClr val="bg1"/>
@@ -3402,7 +3420,7 @@
           </a:prstGeom>
           <a:extLst>
             <a:ext uri="{C572A759-6A51-4108-AA02-DFA0A04FC94B}">
-              <ma14:wrappingTextBoxFlag xmlns:ma14="http://schemas.microsoft.com/office/mac/drawingml/2011/main" xmlns="" val="0"/>
+              <ma14:wrappingTextBoxFlag xmlns="" xmlns:ma14="http://schemas.microsoft.com/office/mac/drawingml/2011/main" val="0"/>
             </a:ext>
           </a:extLst>
         </p:spPr>
@@ -3460,6 +3478,60 @@
           <a:lstStyle/>
           <a:p>
             <a:endParaRPr lang="en-IN"/>
+          </a:p>
+        </p:txBody>
+      </p:sp>
+      <p:sp>
+        <p:nvSpPr>
+          <p:cNvPr id="7" name="TextBox 6">
+            <a:extLst>
+              <a:ext uri="{FF2B5EF4-FFF2-40B4-BE49-F238E27FC236}">
+                <a16:creationId xmlns:a16="http://schemas.microsoft.com/office/drawing/2014/main" id="{AF38A78A-B4E9-7D1A-5C83-97992059A72A}"/>
+              </a:ext>
+            </a:extLst>
+          </p:cNvPr>
+          <p:cNvSpPr txBox="1"/>
+          <p:nvPr/>
+        </p:nvSpPr>
+        <p:spPr>
+          <a:xfrm>
+            <a:off x="457200" y="3536910"/>
+            <a:ext cx="5608320" cy="276999"/>
+          </a:xfrm>
+          <a:prstGeom prst="rect">
+            <a:avLst/>
+          </a:prstGeom>
+          <a:noFill/>
+        </p:spPr>
+        <p:txBody>
+          <a:bodyPr wrap="square">
+            <a:spAutoFit/>
+          </a:bodyPr>
+          <a:lstStyle/>
+          <a:p>
+            <a:pPr>
+              <a:spcAft>
+                <a:spcPts val="750"/>
+              </a:spcAft>
+              <a:buNone/>
+            </a:pPr>
+            <a:r>
+              <a:rPr lang="en-IN" sz="1200" b="1" dirty="0">
+                <a:solidFill>
+                  <a:schemeClr val="bg1"/>
+                </a:solidFill>
+                <a:effectLst/>
+                <a:ea typeface="Times New Roman" panose="02020603050405020304" pitchFamily="18" charset="0"/>
+              </a:rPr>
+              <a:t>Project GitHub Link - https://github.com/sarodesauravi28-ui/Fast-Food-Analysis</a:t>
+            </a:r>
+            <a:endParaRPr lang="en-IN" sz="1200" dirty="0">
+              <a:solidFill>
+                <a:schemeClr val="bg1"/>
+              </a:solidFill>
+              <a:effectLst/>
+              <a:ea typeface="Times New Roman" panose="02020603050405020304" pitchFamily="18" charset="0"/>
+            </a:endParaRPr>
           </a:p>
         </p:txBody>
       </p:sp>
@@ -4034,7 +4106,7 @@
           </a:prstGeom>
           <a:extLst>
             <a:ext uri="{C572A759-6A51-4108-AA02-DFA0A04FC94B}">
-              <ma14:wrappingTextBoxFlag xmlns:ma14="http://schemas.microsoft.com/office/mac/drawingml/2011/main" xmlns="" val="0"/>
+              <ma14:wrappingTextBoxFlag xmlns="" xmlns:ma14="http://schemas.microsoft.com/office/mac/drawingml/2011/main" val="0"/>
             </a:ext>
           </a:extLst>
         </p:spPr>
@@ -4461,7 +4533,7 @@
           </a:prstGeom>
           <a:extLst>
             <a:ext uri="{C572A759-6A51-4108-AA02-DFA0A04FC94B}">
-              <ma14:wrappingTextBoxFlag xmlns:ma14="http://schemas.microsoft.com/office/mac/drawingml/2011/main" xmlns="" val="0"/>
+              <ma14:wrappingTextBoxFlag xmlns="" xmlns:ma14="http://schemas.microsoft.com/office/mac/drawingml/2011/main" val="0"/>
             </a:ext>
           </a:extLst>
         </p:spPr>
@@ -5446,7 +5518,7 @@
           </a:prstGeom>
           <a:extLst>
             <a:ext uri="{C572A759-6A51-4108-AA02-DFA0A04FC94B}">
-              <ma14:wrappingTextBoxFlag xmlns:ma14="http://schemas.microsoft.com/office/mac/drawingml/2011/main" xmlns="" val="0"/>
+              <ma14:wrappingTextBoxFlag xmlns="" xmlns:ma14="http://schemas.microsoft.com/office/mac/drawingml/2011/main" val="0"/>
             </a:ext>
           </a:extLst>
         </p:spPr>
@@ -6515,7 +6587,7 @@
           </a:prstGeom>
           <a:extLst>
             <a:ext uri="{C572A759-6A51-4108-AA02-DFA0A04FC94B}">
-              <ma14:wrappingTextBoxFlag xmlns:ma14="http://schemas.microsoft.com/office/mac/drawingml/2011/main" xmlns="" val="0"/>
+              <ma14:wrappingTextBoxFlag xmlns="" xmlns:ma14="http://schemas.microsoft.com/office/mac/drawingml/2011/main" val="0"/>
             </a:ext>
           </a:extLst>
         </p:spPr>
@@ -6696,7 +6768,7 @@
           </a:prstGeom>
           <a:extLst>
             <a:ext uri="{C572A759-6A51-4108-AA02-DFA0A04FC94B}">
-              <ma14:wrappingTextBoxFlag xmlns:ma14="http://schemas.microsoft.com/office/mac/drawingml/2011/main" xmlns="" val="0"/>
+              <ma14:wrappingTextBoxFlag xmlns="" xmlns:ma14="http://schemas.microsoft.com/office/mac/drawingml/2011/main" val="0"/>
             </a:ext>
           </a:extLst>
         </p:spPr>
@@ -7123,7 +7195,7 @@
           </a:prstGeom>
           <a:extLst>
             <a:ext uri="{C572A759-6A51-4108-AA02-DFA0A04FC94B}">
-              <ma14:wrappingTextBoxFlag xmlns:ma14="http://schemas.microsoft.com/office/mac/drawingml/2011/main" xmlns="" val="0"/>
+              <ma14:wrappingTextBoxFlag xmlns="" xmlns:ma14="http://schemas.microsoft.com/office/mac/drawingml/2011/main" val="0"/>
             </a:ext>
           </a:extLst>
         </p:spPr>
@@ -7912,7 +7984,7 @@
           </a:prstGeom>
           <a:extLst>
             <a:ext uri="{C572A759-6A51-4108-AA02-DFA0A04FC94B}">
-              <ma14:wrappingTextBoxFlag xmlns:ma14="http://schemas.microsoft.com/office/mac/drawingml/2011/main" xmlns="" val="0"/>
+              <ma14:wrappingTextBoxFlag xmlns="" xmlns:ma14="http://schemas.microsoft.com/office/mac/drawingml/2011/main" val="0"/>
             </a:ext>
           </a:extLst>
         </p:spPr>
@@ -8021,7 +8093,7 @@
           </a:prstGeom>
           <a:extLst>
             <a:ext uri="{C572A759-6A51-4108-AA02-DFA0A04FC94B}">
-              <ma14:wrappingTextBoxFlag xmlns:ma14="http://schemas.microsoft.com/office/mac/drawingml/2011/main" xmlns="" val="0"/>
+              <ma14:wrappingTextBoxFlag xmlns="" xmlns:ma14="http://schemas.microsoft.com/office/mac/drawingml/2011/main" val="0"/>
             </a:ext>
           </a:extLst>
         </p:spPr>
@@ -8359,7 +8431,7 @@
           </a:prstGeom>
           <a:extLst>
             <a:ext uri="{C572A759-6A51-4108-AA02-DFA0A04FC94B}">
-              <ma14:wrappingTextBoxFlag xmlns:ma14="http://schemas.microsoft.com/office/mac/drawingml/2011/main" xmlns="" val="0"/>
+              <ma14:wrappingTextBoxFlag xmlns="" xmlns:ma14="http://schemas.microsoft.com/office/mac/drawingml/2011/main" val="0"/>
             </a:ext>
           </a:extLst>
         </p:spPr>
@@ -8777,7 +8849,7 @@
           </a:prstGeom>
           <a:extLst>
             <a:ext uri="{C572A759-6A51-4108-AA02-DFA0A04FC94B}">
-              <ma14:wrappingTextBoxFlag xmlns:ma14="http://schemas.microsoft.com/office/mac/drawingml/2011/main" xmlns="" val="0"/>
+              <ma14:wrappingTextBoxFlag xmlns="" xmlns:ma14="http://schemas.microsoft.com/office/mac/drawingml/2011/main" val="0"/>
             </a:ext>
           </a:extLst>
         </p:spPr>
@@ -9195,7 +9267,7 @@
           </a:prstGeom>
           <a:extLst>
             <a:ext uri="{C572A759-6A51-4108-AA02-DFA0A04FC94B}">
-              <ma14:wrappingTextBoxFlag xmlns:ma14="http://schemas.microsoft.com/office/mac/drawingml/2011/main" xmlns="" val="0"/>
+              <ma14:wrappingTextBoxFlag xmlns="" xmlns:ma14="http://schemas.microsoft.com/office/mac/drawingml/2011/main" val="0"/>
             </a:ext>
           </a:extLst>
         </p:spPr>
